--- a/cmsc125/ostep/slides/01.Virtualization/18.Paging_Introduction.pptx
+++ b/cmsc125/ostep/slides/01.Virtualization/18.Paging_Introduction.pptx
@@ -256,7 +256,7 @@
           <a:p>
             <a:fld id="{050F0499-AE52-4672-879B-3107B2FC2A9F}" type="datetimeFigureOut">
               <a:rPr lang="ko-KR" altLang="en-US" smtClean="0"/>
-              <a:t>2021-10-27</a:t>
+              <a:t>2024-10-10</a:t>
             </a:fld>
             <a:endParaRPr lang="ko-KR" altLang="en-US"/>
           </a:p>
@@ -3367,17 +3367,21 @@
             </a:r>
           </a:p>
           <a:p>
-            <a:pPr lvl="1"/>
             <a:r>
               <a:rPr lang="en-US" altLang="ko-KR" dirty="0"/>
-              <a:t>Simplest form: a linear page table (an array)</a:t>
+              <a:t>Simplest form: a </a:t>
+            </a:r>
+            <a:r>
+              <a:rPr lang="en-US" altLang="ko-KR" b="1" dirty="0"/>
+              <a:t>Linear Page Table</a:t>
+            </a:r>
+            <a:r>
+              <a:rPr lang="en-US" altLang="ko-KR" dirty="0"/>
+              <a:t> (an array) </a:t>
             </a:r>
           </a:p>
           <a:p>
             <a:pPr lvl="1"/>
-            <a:endParaRPr lang="en-US" altLang="ko-KR" dirty="0"/>
-          </a:p>
-          <a:p>
             <a:r>
               <a:rPr lang="en-US" altLang="ko-KR" dirty="0"/>
               <a:t>The OS </a:t>
@@ -3388,7 +3392,7 @@
             </a:r>
             <a:r>
               <a:rPr lang="en-US" altLang="ko-KR" dirty="0"/>
-              <a:t> the array(</a:t>
+              <a:t> the array (</a:t>
             </a:r>
             <a:r>
               <a:rPr lang="en-US" altLang="ko-KR" b="1" dirty="0"/>
@@ -3400,8 +3404,13 @@
             </a:r>
             <a:r>
               <a:rPr lang="en-US" altLang="ko-KR" b="1" dirty="0"/>
-              <a:t>page table entry (PTE)</a:t>
-            </a:r>
+              <a:t>page table entry (PTE) </a:t>
+            </a:r>
+            <a:r>
+              <a:rPr lang="en-US" altLang="ko-KR" dirty="0"/>
+              <a:t>which contain the PFN and other flags</a:t>
+            </a:r>
+            <a:endParaRPr lang="en-US" altLang="ko-KR" b="1" dirty="0"/>
           </a:p>
         </p:txBody>
       </p:sp>
@@ -9000,7 +9009,7 @@
             </a:pPr>
             <a:r>
               <a:rPr lang="en-US" dirty="0"/>
-              <a:t>Code: Assume VPN 1 -&gt; PFN 4</a:t>
+              <a:t>Code: Assume that VPN 1 -&gt; PFN 4</a:t>
             </a:r>
           </a:p>
           <a:p>
